--- a/Main/Study/First Sem/All Notes and Resources Combined/NN Notes/Unit -4 RBFNN.pptx
+++ b/Main/Study/First Sem/All Notes and Resources Combined/NN Notes/Unit -4 RBFNN.pptx
@@ -183,6 +183,45 @@
 
 <file path=ppt/changesInfos/changesInfo1.xml><?xml version="1.0" encoding="utf-8"?>
 <pc:chgInfo xmlns:a="http://schemas.openxmlformats.org/drawingml/2006/main" xmlns:r="http://schemas.openxmlformats.org/officeDocument/2006/relationships" xmlns:ac="http://schemas.microsoft.com/office/drawing/2013/main/command" xmlns:pc="http://schemas.microsoft.com/office/powerpoint/2013/main/command">
+  <pc:docChgLst>
+    <pc:chgData name="Yujan Basnet" userId="495fd8277ebfbaef" providerId="LiveId" clId="{02708A13-394F-4899-994A-4838E8091FDB}"/>
+    <pc:docChg chg="modSld">
+      <pc:chgData name="Yujan Basnet" userId="495fd8277ebfbaef" providerId="LiveId" clId="{02708A13-394F-4899-994A-4838E8091FDB}" dt="2025-06-28T11:03:31.614" v="2" actId="207"/>
+      <pc:docMkLst>
+        <pc:docMk/>
+      </pc:docMkLst>
+      <pc:sldChg chg="modSp mod">
+        <pc:chgData name="Yujan Basnet" userId="495fd8277ebfbaef" providerId="LiveId" clId="{02708A13-394F-4899-994A-4838E8091FDB}" dt="2025-06-27T22:16:39.388" v="0" actId="207"/>
+        <pc:sldMkLst>
+          <pc:docMk/>
+          <pc:sldMk cId="3639393323" sldId="374"/>
+        </pc:sldMkLst>
+        <pc:spChg chg="mod">
+          <ac:chgData name="Yujan Basnet" userId="495fd8277ebfbaef" providerId="LiveId" clId="{02708A13-394F-4899-994A-4838E8091FDB}" dt="2025-06-27T22:16:39.388" v="0" actId="207"/>
+          <ac:spMkLst>
+            <pc:docMk/>
+            <pc:sldMk cId="3639393323" sldId="374"/>
+            <ac:spMk id="3" creationId="{00000000-0000-0000-0000-000000000000}"/>
+          </ac:spMkLst>
+        </pc:spChg>
+      </pc:sldChg>
+      <pc:sldChg chg="modSp mod">
+        <pc:chgData name="Yujan Basnet" userId="495fd8277ebfbaef" providerId="LiveId" clId="{02708A13-394F-4899-994A-4838E8091FDB}" dt="2025-06-28T11:03:31.614" v="2" actId="207"/>
+        <pc:sldMkLst>
+          <pc:docMk/>
+          <pc:sldMk cId="1287436944" sldId="411"/>
+        </pc:sldMkLst>
+        <pc:spChg chg="mod">
+          <ac:chgData name="Yujan Basnet" userId="495fd8277ebfbaef" providerId="LiveId" clId="{02708A13-394F-4899-994A-4838E8091FDB}" dt="2025-06-28T11:03:31.614" v="2" actId="207"/>
+          <ac:spMkLst>
+            <pc:docMk/>
+            <pc:sldMk cId="1287436944" sldId="411"/>
+            <ac:spMk id="88067" creationId="{00000000-0000-0000-0000-000000000000}"/>
+          </ac:spMkLst>
+        </pc:spChg>
+      </pc:sldChg>
+    </pc:docChg>
+  </pc:docChgLst>
   <pc:docChgLst>
     <pc:chgData name="Yujan Basnet" userId="495fd8277ebfbaef" providerId="LiveId" clId="{EC13C3B9-B200-487E-91C9-726DF5114A88}"/>
     <pc:docChg chg="undo custSel modSld">
@@ -1029,7 +1068,7 @@
             <a:fld id="{226EBE57-06B5-493A-882E-E27946C0749C}" type="datetimeFigureOut">
               <a:rPr lang="en-US" smtClean="0"/>
               <a:pPr/>
-              <a:t>6/4/2025</a:t>
+              <a:t>6/28/2025</a:t>
             </a:fld>
             <a:endParaRPr lang="en-US"/>
           </a:p>
@@ -3339,7 +3378,7 @@
             <a:fld id="{24842C7D-C7C6-4ADC-959B-7708E2D9A399}" type="datetime1">
               <a:rPr lang="en-US" smtClean="0"/>
               <a:pPr/>
-              <a:t>6/4/2025</a:t>
+              <a:t>6/28/2025</a:t>
             </a:fld>
             <a:endParaRPr lang="en-US"/>
           </a:p>
@@ -3507,7 +3546,7 @@
             <a:fld id="{D3DCBEB8-E9BD-4146-99BB-BB11BA00A63B}" type="datetime1">
               <a:rPr lang="en-US" smtClean="0"/>
               <a:pPr/>
-              <a:t>6/4/2025</a:t>
+              <a:t>6/28/2025</a:t>
             </a:fld>
             <a:endParaRPr lang="en-US"/>
           </a:p>
@@ -3685,7 +3724,7 @@
             <a:fld id="{0D47ADF4-6FE3-4336-877C-9BB191A83E50}" type="datetime1">
               <a:rPr lang="en-US" smtClean="0"/>
               <a:pPr/>
-              <a:t>6/4/2025</a:t>
+              <a:t>6/28/2025</a:t>
             </a:fld>
             <a:endParaRPr lang="en-US"/>
           </a:p>
@@ -3853,7 +3892,7 @@
             <a:fld id="{AD8E2C38-8235-4A85-B4BD-B2733CA66D8F}" type="datetime1">
               <a:rPr lang="en-US" smtClean="0"/>
               <a:pPr/>
-              <a:t>6/4/2025</a:t>
+              <a:t>6/28/2025</a:t>
             </a:fld>
             <a:endParaRPr lang="en-US"/>
           </a:p>
@@ -4098,7 +4137,7 @@
             <a:fld id="{D4B18E9B-057C-45D4-83F8-6A2C7E821C65}" type="datetime1">
               <a:rPr lang="en-US" smtClean="0"/>
               <a:pPr/>
-              <a:t>6/4/2025</a:t>
+              <a:t>6/28/2025</a:t>
             </a:fld>
             <a:endParaRPr lang="en-US"/>
           </a:p>
@@ -4383,7 +4422,7 @@
             <a:fld id="{47F8BAC7-7920-4D52-8A22-C495D3DE8F93}" type="datetime1">
               <a:rPr lang="en-US" smtClean="0"/>
               <a:pPr/>
-              <a:t>6/4/2025</a:t>
+              <a:t>6/28/2025</a:t>
             </a:fld>
             <a:endParaRPr lang="en-US"/>
           </a:p>
@@ -4802,7 +4841,7 @@
             <a:fld id="{0070657E-AC86-4CA7-8EAC-CEFFEBF52E09}" type="datetime1">
               <a:rPr lang="en-US" smtClean="0"/>
               <a:pPr/>
-              <a:t>6/4/2025</a:t>
+              <a:t>6/28/2025</a:t>
             </a:fld>
             <a:endParaRPr lang="en-US"/>
           </a:p>
@@ -4919,7 +4958,7 @@
             <a:fld id="{A953C837-F5A1-4C7F-9BC7-F94A5C85704E}" type="datetime1">
               <a:rPr lang="en-US" smtClean="0"/>
               <a:pPr/>
-              <a:t>6/4/2025</a:t>
+              <a:t>6/28/2025</a:t>
             </a:fld>
             <a:endParaRPr lang="en-US"/>
           </a:p>
@@ -5014,7 +5053,7 @@
             <a:fld id="{A1034377-CFD5-46EE-B2E3-893140163D23}" type="datetime1">
               <a:rPr lang="en-US" smtClean="0"/>
               <a:pPr/>
-              <a:t>6/4/2025</a:t>
+              <a:t>6/28/2025</a:t>
             </a:fld>
             <a:endParaRPr lang="en-US"/>
           </a:p>
@@ -5289,7 +5328,7 @@
             <a:fld id="{D265AB64-9DEB-493C-98E2-C932B3704B16}" type="datetime1">
               <a:rPr lang="en-US" smtClean="0"/>
               <a:pPr/>
-              <a:t>6/4/2025</a:t>
+              <a:t>6/28/2025</a:t>
             </a:fld>
             <a:endParaRPr lang="en-US"/>
           </a:p>
@@ -5541,7 +5580,7 @@
             <a:fld id="{F9D35383-F6B2-4264-B3FD-7998C8235782}" type="datetime1">
               <a:rPr lang="en-US" smtClean="0"/>
               <a:pPr/>
-              <a:t>6/4/2025</a:t>
+              <a:t>6/28/2025</a:t>
             </a:fld>
             <a:endParaRPr lang="en-US"/>
           </a:p>
@@ -5752,7 +5791,7 @@
             <a:fld id="{DABF30CC-D7DE-434C-BE79-218C0F7310D0}" type="datetime1">
               <a:rPr lang="en-US" smtClean="0"/>
               <a:pPr/>
-              <a:t>6/4/2025</a:t>
+              <a:t>6/28/2025</a:t>
             </a:fld>
             <a:endParaRPr lang="en-US"/>
           </a:p>
@@ -18788,19 +18827,40 @@
               <a:rPr lang="en-US" sz="2600" dirty="0">
                 <a:latin typeface="Book Antiqua" pitchFamily="18" charset="0"/>
               </a:rPr>
-              <a:t>: Draw a sample vector (</a:t>
+              <a:t>: Draw a </a:t>
+            </a:r>
+            <a:r>
+              <a:rPr lang="en-US" sz="2600" dirty="0">
+                <a:solidFill>
+                  <a:srgbClr val="7030A0"/>
+                </a:solidFill>
+                <a:latin typeface="Book Antiqua" pitchFamily="18" charset="0"/>
+              </a:rPr>
+              <a:t>sample vector (</a:t>
             </a:r>
             <a:r>
               <a:rPr lang="en-US" sz="2600" i="1" dirty="0">
+                <a:solidFill>
+                  <a:srgbClr val="7030A0"/>
+                </a:solidFill>
                 <a:latin typeface="Book Antiqua" pitchFamily="18" charset="0"/>
               </a:rPr>
               <a:t>x</a:t>
             </a:r>
             <a:r>
               <a:rPr lang="en-US" sz="2600" dirty="0">
+                <a:solidFill>
+                  <a:srgbClr val="7030A0"/>
+                </a:solidFill>
                 <a:latin typeface="Book Antiqua" pitchFamily="18" charset="0"/>
               </a:rPr>
-              <a:t>) from training set.</a:t>
+              <a:t>) </a:t>
+            </a:r>
+            <a:r>
+              <a:rPr lang="en-US" sz="2600" dirty="0">
+                <a:latin typeface="Book Antiqua" pitchFamily="18" charset="0"/>
+              </a:rPr>
+              <a:t>from training set.</a:t>
             </a:r>
           </a:p>
           <a:p>
@@ -44782,7 +44842,7 @@
             <a:fld id="{2D880FC7-4BDA-4376-AC94-9A26D6041774}" type="datetime1">
               <a:rPr lang="en-US" smtClean="0"/>
               <a:pPr/>
-              <a:t>6/4/2025</a:t>
+              <a:t>6/28/2025</a:t>
             </a:fld>
             <a:endParaRPr lang="en-US"/>
           </a:p>
@@ -44967,7 +45027,7 @@
             <a:fld id="{2D880FC7-4BDA-4376-AC94-9A26D6041774}" type="datetime1">
               <a:rPr lang="en-US" smtClean="0"/>
               <a:pPr/>
-              <a:t>6/4/2025</a:t>
+              <a:t>6/28/2025</a:t>
             </a:fld>
             <a:endParaRPr lang="en-US"/>
           </a:p>
@@ -45163,7 +45223,7 @@
             <a:fld id="{2D880FC7-4BDA-4376-AC94-9A26D6041774}" type="datetime1">
               <a:rPr lang="en-US" smtClean="0"/>
               <a:pPr/>
-              <a:t>6/4/2025</a:t>
+              <a:t>6/28/2025</a:t>
             </a:fld>
             <a:endParaRPr lang="en-US"/>
           </a:p>
@@ -46037,7 +46097,7 @@
             <a:fld id="{2D880FC7-4BDA-4376-AC94-9A26D6041774}" type="datetime1">
               <a:rPr lang="en-US" smtClean="0"/>
               <a:pPr/>
-              <a:t>6/4/2025</a:t>
+              <a:t>6/28/2025</a:t>
             </a:fld>
             <a:endParaRPr lang="en-US"/>
           </a:p>
@@ -46166,7 +46226,7 @@
             <a:fld id="{2D880FC7-4BDA-4376-AC94-9A26D6041774}" type="datetime1">
               <a:rPr lang="en-US" smtClean="0"/>
               <a:pPr/>
-              <a:t>6/4/2025</a:t>
+              <a:t>6/28/2025</a:t>
             </a:fld>
             <a:endParaRPr lang="en-US"/>
           </a:p>
@@ -46366,7 +46426,7 @@
             <a:fld id="{2D880FC7-4BDA-4376-AC94-9A26D6041774}" type="datetime1">
               <a:rPr lang="en-US" smtClean="0"/>
               <a:pPr/>
-              <a:t>6/4/2025</a:t>
+              <a:t>6/28/2025</a:t>
             </a:fld>
             <a:endParaRPr lang="en-US"/>
           </a:p>
@@ -46565,7 +46625,7 @@
             <a:fld id="{2D880FC7-4BDA-4376-AC94-9A26D6041774}" type="datetime1">
               <a:rPr lang="en-US" smtClean="0"/>
               <a:pPr/>
-              <a:t>6/4/2025</a:t>
+              <a:t>6/28/2025</a:t>
             </a:fld>
             <a:endParaRPr lang="en-US"/>
           </a:p>
@@ -46805,7 +46865,7 @@
             <a:fld id="{2D880FC7-4BDA-4376-AC94-9A26D6041774}" type="datetime1">
               <a:rPr lang="en-US" smtClean="0"/>
               <a:pPr/>
-              <a:t>6/4/2025</a:t>
+              <a:t>6/28/2025</a:t>
             </a:fld>
             <a:endParaRPr lang="en-US"/>
           </a:p>
@@ -46979,7 +47039,7 @@
             <a:fld id="{2D880FC7-4BDA-4376-AC94-9A26D6041774}" type="datetime1">
               <a:rPr lang="en-US" smtClean="0"/>
               <a:pPr/>
-              <a:t>6/4/2025</a:t>
+              <a:t>6/28/2025</a:t>
             </a:fld>
             <a:endParaRPr lang="en-US"/>
           </a:p>
@@ -47153,7 +47213,7 @@
             <a:fld id="{2D880FC7-4BDA-4376-AC94-9A26D6041774}" type="datetime1">
               <a:rPr lang="en-US" smtClean="0"/>
               <a:pPr/>
-              <a:t>6/4/2025</a:t>
+              <a:t>6/28/2025</a:t>
             </a:fld>
             <a:endParaRPr lang="en-US"/>
           </a:p>
@@ -47343,7 +47403,7 @@
             <a:fld id="{2D880FC7-4BDA-4376-AC94-9A26D6041774}" type="datetime1">
               <a:rPr lang="en-US" smtClean="0"/>
               <a:pPr/>
-              <a:t>6/4/2025</a:t>
+              <a:t>6/28/2025</a:t>
             </a:fld>
             <a:endParaRPr lang="en-US"/>
           </a:p>
@@ -47498,7 +47558,10 @@
           <a:p>
             <a:pPr lvl="1" algn="just" fontAlgn="base"/>
             <a:r>
-              <a:rPr lang="en-US" sz="2600" dirty="0">
+              <a:rPr lang="en-US" sz="2600" b="1" dirty="0">
+                <a:solidFill>
+                  <a:srgbClr val="00B050"/>
+                </a:solidFill>
                 <a:latin typeface="Book Antiqua" pitchFamily="18" charset="0"/>
               </a:rPr>
               <a:t>Calculate the sum of the absolute values of the weights, called L1.</a:t>
@@ -47507,7 +47570,10 @@
           <a:p>
             <a:pPr lvl="1" algn="just" fontAlgn="base"/>
             <a:r>
-              <a:rPr lang="en-US" sz="2600" dirty="0">
+              <a:rPr lang="en-US" sz="2600" b="1" dirty="0">
+                <a:solidFill>
+                  <a:srgbClr val="00B050"/>
+                </a:solidFill>
                 <a:latin typeface="Book Antiqua" pitchFamily="18" charset="0"/>
               </a:rPr>
               <a:t>Calculate the sum of the squared values of the weights, called L2.</a:t>
@@ -47547,7 +47613,7 @@
             <a:fld id="{2D880FC7-4BDA-4376-AC94-9A26D6041774}" type="datetime1">
               <a:rPr lang="en-US" smtClean="0"/>
               <a:pPr/>
-              <a:t>6/4/2025</a:t>
+              <a:t>6/28/2025</a:t>
             </a:fld>
             <a:endParaRPr lang="en-US"/>
           </a:p>
@@ -47768,7 +47834,7 @@
             <a:fld id="{2D880FC7-4BDA-4376-AC94-9A26D6041774}" type="datetime1">
               <a:rPr lang="en-US" smtClean="0"/>
               <a:pPr/>
-              <a:t>6/4/2025</a:t>
+              <a:t>6/28/2025</a:t>
             </a:fld>
             <a:endParaRPr lang="en-US"/>
           </a:p>
@@ -48812,7 +48878,7 @@
             <a:fld id="{2D880FC7-4BDA-4376-AC94-9A26D6041774}" type="datetime1">
               <a:rPr lang="en-US" smtClean="0"/>
               <a:pPr/>
-              <a:t>6/4/2025</a:t>
+              <a:t>6/28/2025</a:t>
             </a:fld>
             <a:endParaRPr lang="en-US"/>
           </a:p>
@@ -49063,7 +49129,7 @@
             <a:fld id="{2D880FC7-4BDA-4376-AC94-9A26D6041774}" type="datetime1">
               <a:rPr lang="en-US" smtClean="0"/>
               <a:pPr/>
-              <a:t>6/4/2025</a:t>
+              <a:t>6/28/2025</a:t>
             </a:fld>
             <a:endParaRPr lang="en-US"/>
           </a:p>
@@ -49252,7 +49318,7 @@
             <a:fld id="{2D880FC7-4BDA-4376-AC94-9A26D6041774}" type="datetime1">
               <a:rPr lang="en-US" smtClean="0"/>
               <a:pPr/>
-              <a:t>6/4/2025</a:t>
+              <a:t>6/28/2025</a:t>
             </a:fld>
             <a:endParaRPr lang="en-US"/>
           </a:p>
@@ -49465,7 +49531,7 @@
             <a:fld id="{2D880FC7-4BDA-4376-AC94-9A26D6041774}" type="datetime1">
               <a:rPr lang="en-US" smtClean="0"/>
               <a:pPr/>
-              <a:t>6/4/2025</a:t>
+              <a:t>6/28/2025</a:t>
             </a:fld>
             <a:endParaRPr lang="en-US"/>
           </a:p>
@@ -49659,7 +49725,7 @@
             <a:fld id="{2D880FC7-4BDA-4376-AC94-9A26D6041774}" type="datetime1">
               <a:rPr lang="en-US" smtClean="0"/>
               <a:pPr/>
-              <a:t>6/4/2025</a:t>
+              <a:t>6/28/2025</a:t>
             </a:fld>
             <a:endParaRPr lang="en-US"/>
           </a:p>
@@ -49788,7 +49854,7 @@
             <a:fld id="{2D880FC7-4BDA-4376-AC94-9A26D6041774}" type="datetime1">
               <a:rPr lang="en-US" smtClean="0"/>
               <a:pPr/>
-              <a:t>6/4/2025</a:t>
+              <a:t>6/28/2025</a:t>
             </a:fld>
             <a:endParaRPr lang="en-US"/>
           </a:p>
@@ -50072,7 +50138,7 @@
             <a:fld id="{2D880FC7-4BDA-4376-AC94-9A26D6041774}" type="datetime1">
               <a:rPr lang="en-US" smtClean="0"/>
               <a:pPr/>
-              <a:t>6/4/2025</a:t>
+              <a:t>6/28/2025</a:t>
             </a:fld>
             <a:endParaRPr lang="en-US"/>
           </a:p>
